--- a/output_pptx/Joyful_Joyful_We_Adore_Thee.pptx
+++ b/output_pptx/Joyful_Joyful_We_Adore_Thee.pptx
@@ -13,6 +13,9 @@
     <p:sldId id="261" r:id="rId12"/>
     <p:sldId id="262" r:id="rId13"/>
     <p:sldId id="263" r:id="rId14"/>
+    <p:sldId id="264" r:id="rId15"/>
+    <p:sldId id="265" r:id="rId16"/>
+    <p:sldId id="266" r:id="rId17"/>
   </p:sldIdLst>
   <p:sldSz cx="12191695" cy="6858000" type="screen4x3"/>
   <p:notesSz cx="6858000" cy="9144000"/>
@@ -3111,8 +3114,8 @@
         </p:nvSpPr>
         <p:spPr>
           <a:xfrm>
-            <a:off x="594360" y="2258568"/>
-            <a:ext cx="11002975" cy="685800"/>
+            <a:off x="640080" y="2052828"/>
+            <a:ext cx="10911535" cy="731520"/>
           </a:xfrm>
           <a:prstGeom prst="rect">
             <a:avLst/>
@@ -3127,7 +3130,7 @@
           <a:p>
             <a:pPr algn="ctr"/>
             <a:r>
-              <a:rPr sz="4400" b="1" i="0">
+              <a:rPr sz="4800" b="1" i="0">
                 <a:solidFill>
                   <a:srgbClr val="FFFFFF"/>
                 </a:solidFill>
@@ -3146,8 +3149,8 @@
         </p:nvSpPr>
         <p:spPr>
           <a:xfrm>
-            <a:off x="594360" y="2980944"/>
-            <a:ext cx="11002975" cy="347472"/>
+            <a:off x="640080" y="2985516"/>
+            <a:ext cx="10911535" cy="731520"/>
           </a:xfrm>
           <a:prstGeom prst="rect">
             <a:avLst/>
@@ -3162,13 +3165,13 @@
           <a:p>
             <a:pPr algn="ctr"/>
             <a:r>
-              <a:rPr sz="2200" b="0" i="1">
-                <a:solidFill>
-                  <a:srgbClr val="8C8C8C"/>
+              <a:rPr sz="4800" b="1" i="0">
+                <a:solidFill>
+                  <a:srgbClr val="FFFFFF"/>
                 </a:solidFill>
                 <a:latin typeface="Arial"/>
               </a:rPr>
-              <a:t/>
+              <a:t>Em louvor a Ti, Senhor.</a:t>
             </a:r>
           </a:p>
         </p:txBody>
@@ -3181,8 +3184,8 @@
         </p:nvSpPr>
         <p:spPr>
           <a:xfrm>
-            <a:off x="594360" y="3529584"/>
-            <a:ext cx="11002975" cy="685800"/>
+            <a:off x="640080" y="4128516"/>
+            <a:ext cx="10911535" cy="310896"/>
           </a:xfrm>
           <a:prstGeom prst="rect">
             <a:avLst/>
@@ -3197,13 +3200,13 @@
           <a:p>
             <a:pPr algn="ctr"/>
             <a:r>
-              <a:rPr sz="4400" b="1" i="0">
-                <a:solidFill>
-                  <a:srgbClr val="FFFFFF"/>
+              <a:rPr sz="2000" b="0" i="0">
+                <a:solidFill>
+                  <a:srgbClr val="828282"/>
                 </a:solidFill>
                 <a:latin typeface="Arial"/>
               </a:rPr>
-              <a:t>Em louvor a Ti, Senhor.</a:t>
+              <a:t>よろこび　たたえよ</a:t>
             </a:r>
           </a:p>
         </p:txBody>
@@ -3216,8 +3219,8 @@
         </p:nvSpPr>
         <p:spPr>
           <a:xfrm>
-            <a:off x="594360" y="4251960"/>
-            <a:ext cx="11002975" cy="347472"/>
+            <a:off x="640080" y="4494276"/>
+            <a:ext cx="10911535" cy="310896"/>
           </a:xfrm>
           <a:prstGeom prst="rect">
             <a:avLst/>
@@ -3232,13 +3235,205 @@
           <a:p>
             <a:pPr algn="ctr"/>
             <a:r>
-              <a:rPr sz="2200" b="0" i="1">
-                <a:solidFill>
-                  <a:srgbClr val="8C8C8C"/>
+              <a:rPr sz="2000" b="0" i="0">
+                <a:solidFill>
+                  <a:srgbClr val="828282"/>
                 </a:solidFill>
                 <a:latin typeface="Arial"/>
               </a:rPr>
-              <a:t/>
+              <a:t>えいこうの主を</a:t>
+            </a:r>
+          </a:p>
+        </p:txBody>
+      </p:sp>
+    </p:spTree>
+  </p:cSld>
+  <p:clrMapOvr>
+    <a:masterClrMapping/>
+  </p:clrMapOvr>
+</p:sld>
+</file>
+
+<file path=ppt/slides/slide10.xml><?xml version="1.0" encoding="utf-8"?>
+<p:sld xmlns:a="http://schemas.openxmlformats.org/drawingml/2006/main" xmlns:p="http://schemas.openxmlformats.org/presentationml/2006/main" xmlns:r="http://schemas.openxmlformats.org/officeDocument/2006/relationships">
+  <p:cSld>
+    <p:bg>
+      <p:bgPr>
+        <a:solidFill>
+          <a:srgbClr val="000000"/>
+        </a:solidFill>
+        <a:effectLst/>
+      </p:bgPr>
+    </p:bg>
+    <p:spTree>
+      <p:nvGrpSpPr>
+        <p:cNvPr id="1" name=""/>
+        <p:cNvGrpSpPr/>
+        <p:nvPr/>
+      </p:nvGrpSpPr>
+      <p:grpSpPr/>
+      <p:sp>
+        <p:nvSpPr>
+          <p:cNvPr id="2" name="TextBox 1"/>
+          <p:cNvSpPr txBox="1"/>
+          <p:nvPr/>
+        </p:nvSpPr>
+        <p:spPr>
+          <a:xfrm>
+            <a:off x="640080" y="2052828"/>
+            <a:ext cx="10911535" cy="731520"/>
+          </a:xfrm>
+          <a:prstGeom prst="rect">
+            <a:avLst/>
+          </a:prstGeom>
+          <a:noFill/>
+        </p:spPr>
+        <p:txBody>
+          <a:bodyPr wrap="square">
+            <a:spAutoFit/>
+          </a:bodyPr>
+          <a:lstStyle/>
+          <a:p>
+            <a:pPr algn="ctr"/>
+            <a:r>
+              <a:rPr sz="3500" b="1" i="0">
+                <a:solidFill>
+                  <a:srgbClr val="FFFFFF"/>
+                </a:solidFill>
+                <a:latin typeface="Arial"/>
+              </a:rPr>
+              <a:t>Os corações se abrem como flores perante ti</a:t>
+            </a:r>
+          </a:p>
+        </p:txBody>
+      </p:sp>
+      <p:sp>
+        <p:nvSpPr>
+          <p:cNvPr id="3" name="TextBox 2"/>
+          <p:cNvSpPr txBox="1"/>
+          <p:nvPr/>
+        </p:nvSpPr>
+        <p:spPr>
+          <a:xfrm>
+            <a:off x="640080" y="2985516"/>
+            <a:ext cx="10911535" cy="731520"/>
+          </a:xfrm>
+          <a:prstGeom prst="rect">
+            <a:avLst/>
+          </a:prstGeom>
+          <a:noFill/>
+        </p:spPr>
+        <p:txBody>
+          <a:bodyPr wrap="square">
+            <a:spAutoFit/>
+          </a:bodyPr>
+          <a:lstStyle/>
+          <a:p>
+            <a:pPr algn="ctr"/>
+            <a:r>
+              <a:rPr sz="4800" b="1" i="0">
+                <a:solidFill>
+                  <a:srgbClr val="FFFFFF"/>
+                </a:solidFill>
+                <a:latin typeface="Arial"/>
+              </a:rPr>
+              <a:t>Te saudamos acima do sol</a:t>
+            </a:r>
+          </a:p>
+        </p:txBody>
+      </p:sp>
+    </p:spTree>
+  </p:cSld>
+  <p:clrMapOvr>
+    <a:masterClrMapping/>
+  </p:clrMapOvr>
+</p:sld>
+</file>
+
+<file path=ppt/slides/slide11.xml><?xml version="1.0" encoding="utf-8"?>
+<p:sld xmlns:a="http://schemas.openxmlformats.org/drawingml/2006/main" xmlns:p="http://schemas.openxmlformats.org/presentationml/2006/main" xmlns:r="http://schemas.openxmlformats.org/officeDocument/2006/relationships">
+  <p:cSld>
+    <p:bg>
+      <p:bgPr>
+        <a:solidFill>
+          <a:srgbClr val="000000"/>
+        </a:solidFill>
+        <a:effectLst/>
+      </p:bgPr>
+    </p:bg>
+    <p:spTree>
+      <p:nvGrpSpPr>
+        <p:cNvPr id="1" name=""/>
+        <p:cNvGrpSpPr/>
+        <p:nvPr/>
+      </p:nvGrpSpPr>
+      <p:grpSpPr/>
+      <p:sp>
+        <p:nvSpPr>
+          <p:cNvPr id="2" name="TextBox 1"/>
+          <p:cNvSpPr txBox="1"/>
+          <p:nvPr/>
+        </p:nvSpPr>
+        <p:spPr>
+          <a:xfrm>
+            <a:off x="640080" y="2052828"/>
+            <a:ext cx="10911535" cy="731520"/>
+          </a:xfrm>
+          <a:prstGeom prst="rect">
+            <a:avLst/>
+          </a:prstGeom>
+          <a:noFill/>
+        </p:spPr>
+        <p:txBody>
+          <a:bodyPr wrap="square">
+            <a:spAutoFit/>
+          </a:bodyPr>
+          <a:lstStyle/>
+          <a:p>
+            <a:pPr algn="ctr"/>
+            <a:r>
+              <a:rPr sz="3500" b="1" i="0">
+                <a:solidFill>
+                  <a:srgbClr val="FFFFFF"/>
+                </a:solidFill>
+                <a:latin typeface="Arial"/>
+              </a:rPr>
+              <a:t>Os corações se abrem como flores perante ti</a:t>
+            </a:r>
+          </a:p>
+        </p:txBody>
+      </p:sp>
+      <p:sp>
+        <p:nvSpPr>
+          <p:cNvPr id="3" name="TextBox 2"/>
+          <p:cNvSpPr txBox="1"/>
+          <p:nvPr/>
+        </p:nvSpPr>
+        <p:spPr>
+          <a:xfrm>
+            <a:off x="640080" y="2985516"/>
+            <a:ext cx="10911535" cy="731520"/>
+          </a:xfrm>
+          <a:prstGeom prst="rect">
+            <a:avLst/>
+          </a:prstGeom>
+          <a:noFill/>
+        </p:spPr>
+        <p:txBody>
+          <a:bodyPr wrap="square">
+            <a:spAutoFit/>
+          </a:bodyPr>
+          <a:lstStyle/>
+          <a:p>
+            <a:pPr algn="ctr"/>
+            <a:r>
+              <a:rPr sz="4800" b="1" i="0">
+                <a:solidFill>
+                  <a:srgbClr val="FFFFFF"/>
+                </a:solidFill>
+                <a:latin typeface="Arial"/>
+              </a:rPr>
+              <a:t>Te saudamos acima do sol</a:t>
             </a:r>
           </a:p>
         </p:txBody>
@@ -3277,8 +3472,8 @@
         </p:nvSpPr>
         <p:spPr>
           <a:xfrm>
-            <a:off x="594360" y="2258568"/>
-            <a:ext cx="11002975" cy="685800"/>
+            <a:off x="640080" y="2052828"/>
+            <a:ext cx="10911535" cy="731520"/>
           </a:xfrm>
           <a:prstGeom prst="rect">
             <a:avLst/>
@@ -3293,7 +3488,7 @@
           <a:p>
             <a:pPr algn="ctr"/>
             <a:r>
-              <a:rPr sz="4400" b="1" i="0">
+              <a:rPr sz="4800" b="1" i="0">
                 <a:solidFill>
                   <a:srgbClr val="FFFFFF"/>
                 </a:solidFill>
@@ -3312,8 +3507,8 @@
         </p:nvSpPr>
         <p:spPr>
           <a:xfrm>
-            <a:off x="594360" y="2980944"/>
-            <a:ext cx="11002975" cy="347472"/>
+            <a:off x="640080" y="2985516"/>
+            <a:ext cx="10911535" cy="731520"/>
           </a:xfrm>
           <a:prstGeom prst="rect">
             <a:avLst/>
@@ -3328,13 +3523,13 @@
           <a:p>
             <a:pPr algn="ctr"/>
             <a:r>
-              <a:rPr sz="2200" b="0" i="1">
-                <a:solidFill>
-                  <a:srgbClr val="8C8C8C"/>
+              <a:rPr sz="4800" b="1" i="0">
+                <a:solidFill>
+                  <a:srgbClr val="FFFFFF"/>
                 </a:solidFill>
                 <a:latin typeface="Arial"/>
               </a:rPr>
-              <a:t/>
+              <a:t>Deus da glória, Senhor do amor</a:t>
             </a:r>
           </a:p>
         </p:txBody>
@@ -3347,8 +3542,8 @@
         </p:nvSpPr>
         <p:spPr>
           <a:xfrm>
-            <a:off x="594360" y="3529584"/>
-            <a:ext cx="11002975" cy="685800"/>
+            <a:off x="640080" y="4128516"/>
+            <a:ext cx="10911535" cy="310896"/>
           </a:xfrm>
           <a:prstGeom prst="rect">
             <a:avLst/>
@@ -3363,13 +3558,13 @@
           <a:p>
             <a:pPr algn="ctr"/>
             <a:r>
-              <a:rPr sz="4400" b="1" i="0">
-                <a:solidFill>
-                  <a:srgbClr val="FFFFFF"/>
+              <a:rPr sz="2000" b="0" i="0">
+                <a:solidFill>
+                  <a:srgbClr val="828282"/>
                 </a:solidFill>
                 <a:latin typeface="Arial"/>
               </a:rPr>
-              <a:t>Deus da glória, Senhor do amor</a:t>
+              <a:t>こころをひらいて　御名をたたえる</a:t>
             </a:r>
           </a:p>
         </p:txBody>
@@ -3382,8 +3577,8 @@
         </p:nvSpPr>
         <p:spPr>
           <a:xfrm>
-            <a:off x="594360" y="4251960"/>
-            <a:ext cx="11002975" cy="347472"/>
+            <a:off x="640080" y="4494276"/>
+            <a:ext cx="10911535" cy="310896"/>
           </a:xfrm>
           <a:prstGeom prst="rect">
             <a:avLst/>
@@ -3398,13 +3593,13 @@
           <a:p>
             <a:pPr algn="ctr"/>
             <a:r>
-              <a:rPr sz="2200" b="0" i="1">
-                <a:solidFill>
-                  <a:srgbClr val="8C8C8C"/>
+              <a:rPr sz="2000" b="0" i="0">
+                <a:solidFill>
+                  <a:srgbClr val="828282"/>
                 </a:solidFill>
                 <a:latin typeface="Arial"/>
               </a:rPr>
-              <a:t/>
+              <a:t>みまえにつみも,や</a:t>
             </a:r>
           </a:p>
         </p:txBody>
@@ -3443,8 +3638,8 @@
         </p:nvSpPr>
         <p:spPr>
           <a:xfrm>
-            <a:off x="594360" y="2258568"/>
-            <a:ext cx="11002975" cy="685800"/>
+            <a:off x="640080" y="2052828"/>
+            <a:ext cx="10911535" cy="731520"/>
           </a:xfrm>
           <a:prstGeom prst="rect">
             <a:avLst/>
@@ -3459,7 +3654,7 @@
           <a:p>
             <a:pPr algn="ctr"/>
             <a:r>
-              <a:rPr sz="3274" b="1" i="0">
+              <a:rPr sz="3500" b="1" i="0">
                 <a:solidFill>
                   <a:srgbClr val="FFFFFF"/>
                 </a:solidFill>
@@ -3478,8 +3673,8 @@
         </p:nvSpPr>
         <p:spPr>
           <a:xfrm>
-            <a:off x="594360" y="2980944"/>
-            <a:ext cx="11002975" cy="347472"/>
+            <a:off x="640080" y="2985516"/>
+            <a:ext cx="10911535" cy="731520"/>
           </a:xfrm>
           <a:prstGeom prst="rect">
             <a:avLst/>
@@ -3494,83 +3689,13 @@
           <a:p>
             <a:pPr algn="ctr"/>
             <a:r>
-              <a:rPr sz="2200" b="0" i="1">
-                <a:solidFill>
-                  <a:srgbClr val="8C8C8C"/>
-                </a:solidFill>
-                <a:latin typeface="Arial"/>
-              </a:rPr>
-              <a:t/>
-            </a:r>
-          </a:p>
-        </p:txBody>
-      </p:sp>
-      <p:sp>
-        <p:nvSpPr>
-          <p:cNvPr id="4" name="TextBox 3"/>
-          <p:cNvSpPr txBox="1"/>
-          <p:nvPr/>
-        </p:nvSpPr>
-        <p:spPr>
-          <a:xfrm>
-            <a:off x="594360" y="3529584"/>
-            <a:ext cx="11002975" cy="685800"/>
-          </a:xfrm>
-          <a:prstGeom prst="rect">
-            <a:avLst/>
-          </a:prstGeom>
-          <a:noFill/>
-        </p:spPr>
-        <p:txBody>
-          <a:bodyPr wrap="square">
-            <a:spAutoFit/>
-          </a:bodyPr>
-          <a:lstStyle/>
-          <a:p>
-            <a:pPr algn="ctr"/>
-            <a:r>
-              <a:rPr sz="4400" b="1" i="0">
+              <a:rPr sz="4800" b="1" i="0">
                 <a:solidFill>
                   <a:srgbClr val="FFFFFF"/>
                 </a:solidFill>
                 <a:latin typeface="Arial"/>
               </a:rPr>
               <a:t>Te saudamos acima do sol</a:t>
-            </a:r>
-          </a:p>
-        </p:txBody>
-      </p:sp>
-      <p:sp>
-        <p:nvSpPr>
-          <p:cNvPr id="5" name="TextBox 4"/>
-          <p:cNvSpPr txBox="1"/>
-          <p:nvPr/>
-        </p:nvSpPr>
-        <p:spPr>
-          <a:xfrm>
-            <a:off x="594360" y="4251960"/>
-            <a:ext cx="11002975" cy="347472"/>
-          </a:xfrm>
-          <a:prstGeom prst="rect">
-            <a:avLst/>
-          </a:prstGeom>
-          <a:noFill/>
-        </p:spPr>
-        <p:txBody>
-          <a:bodyPr wrap="square">
-            <a:spAutoFit/>
-          </a:bodyPr>
-          <a:lstStyle/>
-          <a:p>
-            <a:pPr algn="ctr"/>
-            <a:r>
-              <a:rPr sz="2200" b="0" i="1">
-                <a:solidFill>
-                  <a:srgbClr val="8C8C8C"/>
-                </a:solidFill>
-                <a:latin typeface="Arial"/>
-              </a:rPr>
-              <a:t/>
             </a:r>
           </a:p>
         </p:txBody>
@@ -3609,8 +3734,8 @@
         </p:nvSpPr>
         <p:spPr>
           <a:xfrm>
-            <a:off x="594360" y="1837944"/>
-            <a:ext cx="11002975" cy="685800"/>
+            <a:off x="640080" y="1650492"/>
+            <a:ext cx="10911535" cy="731520"/>
           </a:xfrm>
           <a:prstGeom prst="rect">
             <a:avLst/>
@@ -3625,7 +3750,7 @@
           <a:p>
             <a:pPr algn="ctr"/>
             <a:r>
-              <a:rPr sz="4400" b="1" i="0">
+              <a:rPr sz="4800" b="1" i="0">
                 <a:solidFill>
                   <a:srgbClr val="FFFFFF"/>
                 </a:solidFill>
@@ -3644,8 +3769,8 @@
         </p:nvSpPr>
         <p:spPr>
           <a:xfrm>
-            <a:off x="594360" y="2560320"/>
-            <a:ext cx="11002975" cy="384048"/>
+            <a:off x="640080" y="2418588"/>
+            <a:ext cx="10911535" cy="365760"/>
           </a:xfrm>
           <a:prstGeom prst="rect">
             <a:avLst/>
@@ -3662,7 +3787,7 @@
             <a:r>
               <a:rPr sz="2400" b="0" i="1">
                 <a:solidFill>
-                  <a:srgbClr val="B4B4B4"/>
+                  <a:srgbClr val="AAAAAA"/>
                 </a:solidFill>
                 <a:latin typeface="Arial"/>
               </a:rPr>
@@ -3679,8 +3804,8 @@
         </p:nvSpPr>
         <p:spPr>
           <a:xfrm>
-            <a:off x="594360" y="2980944"/>
-            <a:ext cx="11002975" cy="347472"/>
+            <a:off x="640080" y="2985516"/>
+            <a:ext cx="10911535" cy="731520"/>
           </a:xfrm>
           <a:prstGeom prst="rect">
             <a:avLst/>
@@ -3695,13 +3820,13 @@
           <a:p>
             <a:pPr algn="ctr"/>
             <a:r>
-              <a:rPr sz="2000" b="0" i="1">
-                <a:solidFill>
-                  <a:srgbClr val="8C8C8C"/>
+              <a:rPr sz="4800" b="1" i="0">
+                <a:solidFill>
+                  <a:srgbClr val="FFFFFF"/>
                 </a:solidFill>
                 <a:latin typeface="Arial"/>
               </a:rPr>
-              <a:t/>
+              <a:t>えいこうの主を</a:t>
             </a:r>
           </a:p>
         </p:txBody>
@@ -3714,8 +3839,8 @@
         </p:nvSpPr>
         <p:spPr>
           <a:xfrm>
-            <a:off x="594360" y="3529584"/>
-            <a:ext cx="11002975" cy="685800"/>
+            <a:off x="640080" y="3753612"/>
+            <a:ext cx="10911535" cy="365760"/>
           </a:xfrm>
           <a:prstGeom prst="rect">
             <a:avLst/>
@@ -3730,13 +3855,13 @@
           <a:p>
             <a:pPr algn="ctr"/>
             <a:r>
-              <a:rPr sz="4400" b="1" i="0">
-                <a:solidFill>
-                  <a:srgbClr val="FFFFFF"/>
+              <a:rPr sz="2400" b="0" i="1">
+                <a:solidFill>
+                  <a:srgbClr val="AAAAAA"/>
                 </a:solidFill>
                 <a:latin typeface="Arial"/>
               </a:rPr>
-              <a:t>えいこうの主を</a:t>
+              <a:t>eikou no shu wo</a:t>
             </a:r>
           </a:p>
         </p:txBody>
@@ -3749,8 +3874,8 @@
         </p:nvSpPr>
         <p:spPr>
           <a:xfrm>
-            <a:off x="594360" y="4251960"/>
-            <a:ext cx="11002975" cy="384048"/>
+            <a:off x="640080" y="4530852"/>
+            <a:ext cx="10911535" cy="310896"/>
           </a:xfrm>
           <a:prstGeom prst="rect">
             <a:avLst/>
@@ -3765,13 +3890,13 @@
           <a:p>
             <a:pPr algn="ctr"/>
             <a:r>
-              <a:rPr sz="2400" b="0" i="1">
-                <a:solidFill>
-                  <a:srgbClr val="B4B4B4"/>
+              <a:rPr sz="2000" b="0" i="1">
+                <a:solidFill>
+                  <a:srgbClr val="828282"/>
                 </a:solidFill>
                 <a:latin typeface="Arial"/>
               </a:rPr>
-              <a:t>eikou no shu wo</a:t>
+              <a:t>Nosso coração transborda</a:t>
             </a:r>
           </a:p>
         </p:txBody>
@@ -3784,8 +3909,8 @@
         </p:nvSpPr>
         <p:spPr>
           <a:xfrm>
-            <a:off x="594360" y="4672584"/>
-            <a:ext cx="11002975" cy="347472"/>
+            <a:off x="640080" y="4896612"/>
+            <a:ext cx="10911535" cy="310896"/>
           </a:xfrm>
           <a:prstGeom prst="rect">
             <a:avLst/>
@@ -3802,11 +3927,11 @@
             <a:r>
               <a:rPr sz="2000" b="0" i="1">
                 <a:solidFill>
-                  <a:srgbClr val="8C8C8C"/>
+                  <a:srgbClr val="828282"/>
                 </a:solidFill>
                 <a:latin typeface="Arial"/>
               </a:rPr>
-              <a:t/>
+              <a:t>Em louvor a Ti, Senhor.</a:t>
             </a:r>
           </a:p>
         </p:txBody>
@@ -3845,8 +3970,8 @@
         </p:nvSpPr>
         <p:spPr>
           <a:xfrm>
-            <a:off x="594360" y="1837944"/>
-            <a:ext cx="11002975" cy="685800"/>
+            <a:off x="640080" y="1650492"/>
+            <a:ext cx="10911535" cy="731520"/>
           </a:xfrm>
           <a:prstGeom prst="rect">
             <a:avLst/>
@@ -3861,7 +3986,7 @@
           <a:p>
             <a:pPr algn="ctr"/>
             <a:r>
-              <a:rPr sz="4400" b="1" i="0">
+              <a:rPr sz="4800" b="1" i="0">
                 <a:solidFill>
                   <a:srgbClr val="FFFFFF"/>
                 </a:solidFill>
@@ -3880,8 +4005,8 @@
         </p:nvSpPr>
         <p:spPr>
           <a:xfrm>
-            <a:off x="594360" y="2560320"/>
-            <a:ext cx="11002975" cy="384048"/>
+            <a:off x="640080" y="2418588"/>
+            <a:ext cx="10911535" cy="365760"/>
           </a:xfrm>
           <a:prstGeom prst="rect">
             <a:avLst/>
@@ -3898,7 +4023,7 @@
             <a:r>
               <a:rPr sz="2400" b="0" i="1">
                 <a:solidFill>
-                  <a:srgbClr val="B4B4B4"/>
+                  <a:srgbClr val="AAAAAA"/>
                 </a:solidFill>
                 <a:latin typeface="Arial"/>
               </a:rPr>
@@ -3915,8 +4040,8 @@
         </p:nvSpPr>
         <p:spPr>
           <a:xfrm>
-            <a:off x="594360" y="2980944"/>
-            <a:ext cx="11002975" cy="347472"/>
+            <a:off x="640080" y="2985516"/>
+            <a:ext cx="10911535" cy="731520"/>
           </a:xfrm>
           <a:prstGeom prst="rect">
             <a:avLst/>
@@ -3931,13 +4056,13 @@
           <a:p>
             <a:pPr algn="ctr"/>
             <a:r>
-              <a:rPr sz="2000" b="0" i="1">
-                <a:solidFill>
-                  <a:srgbClr val="8C8C8C"/>
+              <a:rPr sz="4800" b="1" i="0">
+                <a:solidFill>
+                  <a:srgbClr val="FFFFFF"/>
                 </a:solidFill>
                 <a:latin typeface="Arial"/>
               </a:rPr>
-              <a:t/>
+              <a:t>みまえにつみも,や</a:t>
             </a:r>
           </a:p>
         </p:txBody>
@@ -3950,8 +4075,8 @@
         </p:nvSpPr>
         <p:spPr>
           <a:xfrm>
-            <a:off x="594360" y="3529584"/>
-            <a:ext cx="11002975" cy="685800"/>
+            <a:off x="640080" y="3753612"/>
+            <a:ext cx="10911535" cy="365760"/>
           </a:xfrm>
           <a:prstGeom prst="rect">
             <a:avLst/>
@@ -3966,13 +4091,13 @@
           <a:p>
             <a:pPr algn="ctr"/>
             <a:r>
-              <a:rPr sz="4400" b="1" i="0">
-                <a:solidFill>
-                  <a:srgbClr val="FFFFFF"/>
+              <a:rPr sz="2400" b="0" i="1">
+                <a:solidFill>
+                  <a:srgbClr val="AAAAAA"/>
                 </a:solidFill>
                 <a:latin typeface="Arial"/>
               </a:rPr>
-              <a:t>みまえにつみも,や</a:t>
+              <a:t>mimaenitsumimo , ya</a:t>
             </a:r>
           </a:p>
         </p:txBody>
@@ -3985,8 +4110,8 @@
         </p:nvSpPr>
         <p:spPr>
           <a:xfrm>
-            <a:off x="594360" y="4251960"/>
-            <a:ext cx="11002975" cy="384048"/>
+            <a:off x="640080" y="4530852"/>
+            <a:ext cx="10911535" cy="310896"/>
           </a:xfrm>
           <a:prstGeom prst="rect">
             <a:avLst/>
@@ -4001,13 +4126,13 @@
           <a:p>
             <a:pPr algn="ctr"/>
             <a:r>
-              <a:rPr sz="2400" b="0" i="1">
-                <a:solidFill>
-                  <a:srgbClr val="B4B4B4"/>
+              <a:rPr sz="2000" b="0" i="1">
+                <a:solidFill>
+                  <a:srgbClr val="828282"/>
                 </a:solidFill>
                 <a:latin typeface="Arial"/>
               </a:rPr>
-              <a:t>mimaenitsumimo , ya</a:t>
+              <a:t>Allegria, alegria nós o adoramos</a:t>
             </a:r>
           </a:p>
         </p:txBody>
@@ -4020,8 +4145,8 @@
         </p:nvSpPr>
         <p:spPr>
           <a:xfrm>
-            <a:off x="594360" y="4672584"/>
-            <a:ext cx="11002975" cy="347472"/>
+            <a:off x="640080" y="4896612"/>
+            <a:ext cx="10911535" cy="310896"/>
           </a:xfrm>
           <a:prstGeom prst="rect">
             <a:avLst/>
@@ -4038,11 +4163,11 @@
             <a:r>
               <a:rPr sz="2000" b="0" i="1">
                 <a:solidFill>
-                  <a:srgbClr val="8C8C8C"/>
+                  <a:srgbClr val="828282"/>
                 </a:solidFill>
                 <a:latin typeface="Arial"/>
               </a:rPr>
-              <a:t/>
+              <a:t>Deus da glória, Senhor do amor</a:t>
             </a:r>
           </a:p>
         </p:txBody>
@@ -4081,8 +4206,8 @@
         </p:nvSpPr>
         <p:spPr>
           <a:xfrm>
-            <a:off x="594360" y="1837944"/>
-            <a:ext cx="11002975" cy="685800"/>
+            <a:off x="640080" y="1650492"/>
+            <a:ext cx="10911535" cy="731520"/>
           </a:xfrm>
           <a:prstGeom prst="rect">
             <a:avLst/>
@@ -4097,7 +4222,7 @@
           <a:p>
             <a:pPr algn="ctr"/>
             <a:r>
-              <a:rPr sz="4400" b="1" i="0">
+              <a:rPr sz="4800" b="1" i="0">
                 <a:solidFill>
                   <a:srgbClr val="FFFFFF"/>
                 </a:solidFill>
@@ -4116,8 +4241,8 @@
         </p:nvSpPr>
         <p:spPr>
           <a:xfrm>
-            <a:off x="594360" y="2560320"/>
-            <a:ext cx="11002975" cy="384048"/>
+            <a:off x="640080" y="2418588"/>
+            <a:ext cx="10911535" cy="365760"/>
           </a:xfrm>
           <a:prstGeom prst="rect">
             <a:avLst/>
@@ -4134,7 +4259,7 @@
             <a:r>
               <a:rPr sz="2400" b="0" i="1">
                 <a:solidFill>
-                  <a:srgbClr val="B4B4B4"/>
+                  <a:srgbClr val="AAAAAA"/>
                 </a:solidFill>
                 <a:latin typeface="Arial"/>
               </a:rPr>
@@ -4151,8 +4276,8 @@
         </p:nvSpPr>
         <p:spPr>
           <a:xfrm>
-            <a:off x="594360" y="2980944"/>
-            <a:ext cx="11002975" cy="347472"/>
+            <a:off x="640080" y="2985516"/>
+            <a:ext cx="10911535" cy="731520"/>
           </a:xfrm>
           <a:prstGeom prst="rect">
             <a:avLst/>
@@ -4167,13 +4292,13 @@
           <a:p>
             <a:pPr algn="ctr"/>
             <a:r>
-              <a:rPr sz="2000" b="0" i="1">
-                <a:solidFill>
-                  <a:srgbClr val="8C8C8C"/>
+              <a:rPr sz="4800" b="1" i="0">
+                <a:solidFill>
+                  <a:srgbClr val="FFFFFF"/>
                 </a:solidFill>
                 <a:latin typeface="Arial"/>
               </a:rPr>
-              <a:t/>
+              <a:t>とわのよろこびと　ひかりに満ちる</a:t>
             </a:r>
           </a:p>
         </p:txBody>
@@ -4186,8 +4311,8 @@
         </p:nvSpPr>
         <p:spPr>
           <a:xfrm>
-            <a:off x="594360" y="3529584"/>
-            <a:ext cx="11002975" cy="685800"/>
+            <a:off x="640080" y="3753612"/>
+            <a:ext cx="10911535" cy="365760"/>
           </a:xfrm>
           <a:prstGeom prst="rect">
             <a:avLst/>
@@ -4202,83 +4327,13 @@
           <a:p>
             <a:pPr algn="ctr"/>
             <a:r>
-              <a:rPr sz="4400" b="1" i="0">
-                <a:solidFill>
-                  <a:srgbClr val="FFFFFF"/>
-                </a:solidFill>
-                <a:latin typeface="Arial"/>
-              </a:rPr>
-              <a:t>とわのよろこびと　ひかりに満ちる</a:t>
-            </a:r>
-          </a:p>
-        </p:txBody>
-      </p:sp>
-      <p:sp>
-        <p:nvSpPr>
-          <p:cNvPr id="6" name="TextBox 5"/>
-          <p:cNvSpPr txBox="1"/>
-          <p:nvPr/>
-        </p:nvSpPr>
-        <p:spPr>
-          <a:xfrm>
-            <a:off x="594360" y="4251960"/>
-            <a:ext cx="11002975" cy="384048"/>
-          </a:xfrm>
-          <a:prstGeom prst="rect">
-            <a:avLst/>
-          </a:prstGeom>
-          <a:noFill/>
-        </p:spPr>
-        <p:txBody>
-          <a:bodyPr wrap="square">
-            <a:spAutoFit/>
-          </a:bodyPr>
-          <a:lstStyle/>
-          <a:p>
-            <a:pPr algn="ctr"/>
-            <a:r>
               <a:rPr sz="2400" b="0" i="1">
                 <a:solidFill>
-                  <a:srgbClr val="B4B4B4"/>
+                  <a:srgbClr val="AAAAAA"/>
                 </a:solidFill>
                 <a:latin typeface="Arial"/>
               </a:rPr>
               <a:t>towano yorokobito hikarini michiru</a:t>
-            </a:r>
-          </a:p>
-        </p:txBody>
-      </p:sp>
-      <p:sp>
-        <p:nvSpPr>
-          <p:cNvPr id="7" name="TextBox 6"/>
-          <p:cNvSpPr txBox="1"/>
-          <p:nvPr/>
-        </p:nvSpPr>
-        <p:spPr>
-          <a:xfrm>
-            <a:off x="594360" y="4672584"/>
-            <a:ext cx="11002975" cy="347472"/>
-          </a:xfrm>
-          <a:prstGeom prst="rect">
-            <a:avLst/>
-          </a:prstGeom>
-          <a:noFill/>
-        </p:spPr>
-        <p:txBody>
-          <a:bodyPr wrap="square">
-            <a:spAutoFit/>
-          </a:bodyPr>
-          <a:lstStyle/>
-          <a:p>
-            <a:pPr algn="ctr"/>
-            <a:r>
-              <a:rPr sz="2000" b="0" i="1">
-                <a:solidFill>
-                  <a:srgbClr val="8C8C8C"/>
-                </a:solidFill>
-                <a:latin typeface="Arial"/>
-              </a:rPr>
-              <a:t/>
             </a:r>
           </a:p>
         </p:txBody>
@@ -4317,8 +4372,8 @@
         </p:nvSpPr>
         <p:spPr>
           <a:xfrm>
-            <a:off x="594360" y="2258568"/>
-            <a:ext cx="11002975" cy="685800"/>
+            <a:off x="640080" y="2052828"/>
+            <a:ext cx="10911535" cy="731520"/>
           </a:xfrm>
           <a:prstGeom prst="rect">
             <a:avLst/>
@@ -4333,7 +4388,7 @@
           <a:p>
             <a:pPr algn="ctr"/>
             <a:r>
-              <a:rPr sz="3274" b="1" i="0">
+              <a:rPr sz="3500" b="1" i="0">
                 <a:solidFill>
                   <a:srgbClr val="FFFFFF"/>
                 </a:solidFill>
@@ -4352,8 +4407,8 @@
         </p:nvSpPr>
         <p:spPr>
           <a:xfrm>
-            <a:off x="594360" y="2980944"/>
-            <a:ext cx="11002975" cy="347472"/>
+            <a:off x="640080" y="2985516"/>
+            <a:ext cx="10911535" cy="731520"/>
           </a:xfrm>
           <a:prstGeom prst="rect">
             <a:avLst/>
@@ -4368,83 +4423,13 @@
           <a:p>
             <a:pPr algn="ctr"/>
             <a:r>
-              <a:rPr sz="2200" b="0" i="1">
-                <a:solidFill>
-                  <a:srgbClr val="8C8C8C"/>
-                </a:solidFill>
-                <a:latin typeface="Arial"/>
-              </a:rPr>
-              <a:t/>
-            </a:r>
-          </a:p>
-        </p:txBody>
-      </p:sp>
-      <p:sp>
-        <p:nvSpPr>
-          <p:cNvPr id="4" name="TextBox 3"/>
-          <p:cNvSpPr txBox="1"/>
-          <p:nvPr/>
-        </p:nvSpPr>
-        <p:spPr>
-          <a:xfrm>
-            <a:off x="594360" y="3529584"/>
-            <a:ext cx="11002975" cy="685800"/>
-          </a:xfrm>
-          <a:prstGeom prst="rect">
-            <a:avLst/>
-          </a:prstGeom>
-          <a:noFill/>
-        </p:spPr>
-        <p:txBody>
-          <a:bodyPr wrap="square">
-            <a:spAutoFit/>
-          </a:bodyPr>
-          <a:lstStyle/>
-          <a:p>
-            <a:pPr algn="ctr"/>
-            <a:r>
-              <a:rPr sz="4400" b="1" i="0">
+              <a:rPr sz="4800" b="1" i="0">
                 <a:solidFill>
                   <a:srgbClr val="FFFFFF"/>
                 </a:solidFill>
                 <a:latin typeface="Arial"/>
               </a:rPr>
               <a:t>Te saudamos acima do sol</a:t>
-            </a:r>
-          </a:p>
-        </p:txBody>
-      </p:sp>
-      <p:sp>
-        <p:nvSpPr>
-          <p:cNvPr id="5" name="TextBox 4"/>
-          <p:cNvSpPr txBox="1"/>
-          <p:nvPr/>
-        </p:nvSpPr>
-        <p:spPr>
-          <a:xfrm>
-            <a:off x="594360" y="4251960"/>
-            <a:ext cx="11002975" cy="347472"/>
-          </a:xfrm>
-          <a:prstGeom prst="rect">
-            <a:avLst/>
-          </a:prstGeom>
-          <a:noFill/>
-        </p:spPr>
-        <p:txBody>
-          <a:bodyPr wrap="square">
-            <a:spAutoFit/>
-          </a:bodyPr>
-          <a:lstStyle/>
-          <a:p>
-            <a:pPr algn="ctr"/>
-            <a:r>
-              <a:rPr sz="2200" b="0" i="1">
-                <a:solidFill>
-                  <a:srgbClr val="8C8C8C"/>
-                </a:solidFill>
-                <a:latin typeface="Arial"/>
-              </a:rPr>
-              <a:t/>
             </a:r>
           </a:p>
         </p:txBody>
@@ -4483,8 +4468,8 @@
         </p:nvSpPr>
         <p:spPr>
           <a:xfrm>
-            <a:off x="594360" y="2258568"/>
-            <a:ext cx="11002975" cy="685800"/>
+            <a:off x="640080" y="2052828"/>
+            <a:ext cx="10911535" cy="731520"/>
           </a:xfrm>
           <a:prstGeom prst="rect">
             <a:avLst/>
@@ -4499,13 +4484,13 @@
           <a:p>
             <a:pPr algn="ctr"/>
             <a:r>
-              <a:rPr sz="3274" b="1" i="0">
+              <a:rPr sz="4800" b="1" i="0">
                 <a:solidFill>
                   <a:srgbClr val="FFFFFF"/>
                 </a:solidFill>
                 <a:latin typeface="Arial"/>
               </a:rPr>
-              <a:t>Os corações se abrem como flores perante ti</a:t>
+              <a:t>Nosso coração transborda</a:t>
             </a:r>
           </a:p>
         </p:txBody>
@@ -4518,8 +4503,8 @@
         </p:nvSpPr>
         <p:spPr>
           <a:xfrm>
-            <a:off x="594360" y="2980944"/>
-            <a:ext cx="11002975" cy="347472"/>
+            <a:off x="640080" y="2985516"/>
+            <a:ext cx="10911535" cy="731520"/>
           </a:xfrm>
           <a:prstGeom prst="rect">
             <a:avLst/>
@@ -4534,13 +4519,13 @@
           <a:p>
             <a:pPr algn="ctr"/>
             <a:r>
-              <a:rPr sz="2200" b="0" i="1">
-                <a:solidFill>
-                  <a:srgbClr val="8C8C8C"/>
+              <a:rPr sz="4800" b="1" i="0">
+                <a:solidFill>
+                  <a:srgbClr val="FFFFFF"/>
                 </a:solidFill>
                 <a:latin typeface="Arial"/>
               </a:rPr>
-              <a:t/>
+              <a:t>Em louvor a Ti, Senhor.</a:t>
             </a:r>
           </a:p>
         </p:txBody>
@@ -4553,8 +4538,8 @@
         </p:nvSpPr>
         <p:spPr>
           <a:xfrm>
-            <a:off x="594360" y="3529584"/>
-            <a:ext cx="11002975" cy="685800"/>
+            <a:off x="640080" y="4128516"/>
+            <a:ext cx="10911535" cy="310896"/>
           </a:xfrm>
           <a:prstGeom prst="rect">
             <a:avLst/>
@@ -4569,13 +4554,13 @@
           <a:p>
             <a:pPr algn="ctr"/>
             <a:r>
-              <a:rPr sz="4400" b="1" i="0">
-                <a:solidFill>
-                  <a:srgbClr val="FFFFFF"/>
+              <a:rPr sz="2000" b="0" i="0">
+                <a:solidFill>
+                  <a:srgbClr val="828282"/>
                 </a:solidFill>
                 <a:latin typeface="Arial"/>
               </a:rPr>
-              <a:t>Te saudamos acima do sol</a:t>
+              <a:t>よろこび　たたえよ</a:t>
             </a:r>
           </a:p>
         </p:txBody>
@@ -4588,8 +4573,8 @@
         </p:nvSpPr>
         <p:spPr>
           <a:xfrm>
-            <a:off x="594360" y="4251960"/>
-            <a:ext cx="11002975" cy="347472"/>
+            <a:off x="640080" y="4494276"/>
+            <a:ext cx="10911535" cy="310896"/>
           </a:xfrm>
           <a:prstGeom prst="rect">
             <a:avLst/>
@@ -4604,13 +4589,179 @@
           <a:p>
             <a:pPr algn="ctr"/>
             <a:r>
-              <a:rPr sz="2200" b="0" i="1">
-                <a:solidFill>
-                  <a:srgbClr val="8C8C8C"/>
+              <a:rPr sz="2000" b="0" i="0">
+                <a:solidFill>
+                  <a:srgbClr val="828282"/>
                 </a:solidFill>
                 <a:latin typeface="Arial"/>
               </a:rPr>
-              <a:t/>
+              <a:t>えいこうの主を</a:t>
+            </a:r>
+          </a:p>
+        </p:txBody>
+      </p:sp>
+    </p:spTree>
+  </p:cSld>
+  <p:clrMapOvr>
+    <a:masterClrMapping/>
+  </p:clrMapOvr>
+</p:sld>
+</file>
+
+<file path=ppt/slides/slide9.xml><?xml version="1.0" encoding="utf-8"?>
+<p:sld xmlns:a="http://schemas.openxmlformats.org/drawingml/2006/main" xmlns:p="http://schemas.openxmlformats.org/presentationml/2006/main" xmlns:r="http://schemas.openxmlformats.org/officeDocument/2006/relationships">
+  <p:cSld>
+    <p:bg>
+      <p:bgPr>
+        <a:solidFill>
+          <a:srgbClr val="000000"/>
+        </a:solidFill>
+        <a:effectLst/>
+      </p:bgPr>
+    </p:bg>
+    <p:spTree>
+      <p:nvGrpSpPr>
+        <p:cNvPr id="1" name=""/>
+        <p:cNvGrpSpPr/>
+        <p:nvPr/>
+      </p:nvGrpSpPr>
+      <p:grpSpPr/>
+      <p:sp>
+        <p:nvSpPr>
+          <p:cNvPr id="2" name="TextBox 1"/>
+          <p:cNvSpPr txBox="1"/>
+          <p:nvPr/>
+        </p:nvSpPr>
+        <p:spPr>
+          <a:xfrm>
+            <a:off x="640080" y="2052828"/>
+            <a:ext cx="10911535" cy="731520"/>
+          </a:xfrm>
+          <a:prstGeom prst="rect">
+            <a:avLst/>
+          </a:prstGeom>
+          <a:noFill/>
+        </p:spPr>
+        <p:txBody>
+          <a:bodyPr wrap="square">
+            <a:spAutoFit/>
+          </a:bodyPr>
+          <a:lstStyle/>
+          <a:p>
+            <a:pPr algn="ctr"/>
+            <a:r>
+              <a:rPr sz="4800" b="1" i="0">
+                <a:solidFill>
+                  <a:srgbClr val="FFFFFF"/>
+                </a:solidFill>
+                <a:latin typeface="Arial"/>
+              </a:rPr>
+              <a:t>Allegria, alegria nós o adoramos</a:t>
+            </a:r>
+          </a:p>
+        </p:txBody>
+      </p:sp>
+      <p:sp>
+        <p:nvSpPr>
+          <p:cNvPr id="3" name="TextBox 2"/>
+          <p:cNvSpPr txBox="1"/>
+          <p:nvPr/>
+        </p:nvSpPr>
+        <p:spPr>
+          <a:xfrm>
+            <a:off x="640080" y="2985516"/>
+            <a:ext cx="10911535" cy="731520"/>
+          </a:xfrm>
+          <a:prstGeom prst="rect">
+            <a:avLst/>
+          </a:prstGeom>
+          <a:noFill/>
+        </p:spPr>
+        <p:txBody>
+          <a:bodyPr wrap="square">
+            <a:spAutoFit/>
+          </a:bodyPr>
+          <a:lstStyle/>
+          <a:p>
+            <a:pPr algn="ctr"/>
+            <a:r>
+              <a:rPr sz="4800" b="1" i="0">
+                <a:solidFill>
+                  <a:srgbClr val="FFFFFF"/>
+                </a:solidFill>
+                <a:latin typeface="Arial"/>
+              </a:rPr>
+              <a:t>Deus da glória, Senhor do amor</a:t>
+            </a:r>
+          </a:p>
+        </p:txBody>
+      </p:sp>
+      <p:sp>
+        <p:nvSpPr>
+          <p:cNvPr id="4" name="TextBox 3"/>
+          <p:cNvSpPr txBox="1"/>
+          <p:nvPr/>
+        </p:nvSpPr>
+        <p:spPr>
+          <a:xfrm>
+            <a:off x="640080" y="4128516"/>
+            <a:ext cx="10911535" cy="310896"/>
+          </a:xfrm>
+          <a:prstGeom prst="rect">
+            <a:avLst/>
+          </a:prstGeom>
+          <a:noFill/>
+        </p:spPr>
+        <p:txBody>
+          <a:bodyPr wrap="square">
+            <a:spAutoFit/>
+          </a:bodyPr>
+          <a:lstStyle/>
+          <a:p>
+            <a:pPr algn="ctr"/>
+            <a:r>
+              <a:rPr sz="2000" b="0" i="0">
+                <a:solidFill>
+                  <a:srgbClr val="828282"/>
+                </a:solidFill>
+                <a:latin typeface="Arial"/>
+              </a:rPr>
+              <a:t>こころをひらいて　御名をたたえる</a:t>
+            </a:r>
+          </a:p>
+        </p:txBody>
+      </p:sp>
+      <p:sp>
+        <p:nvSpPr>
+          <p:cNvPr id="5" name="TextBox 4"/>
+          <p:cNvSpPr txBox="1"/>
+          <p:nvPr/>
+        </p:nvSpPr>
+        <p:spPr>
+          <a:xfrm>
+            <a:off x="640080" y="4494276"/>
+            <a:ext cx="10911535" cy="310896"/>
+          </a:xfrm>
+          <a:prstGeom prst="rect">
+            <a:avLst/>
+          </a:prstGeom>
+          <a:noFill/>
+        </p:spPr>
+        <p:txBody>
+          <a:bodyPr wrap="square">
+            <a:spAutoFit/>
+          </a:bodyPr>
+          <a:lstStyle/>
+          <a:p>
+            <a:pPr algn="ctr"/>
+            <a:r>
+              <a:rPr sz="2000" b="0" i="0">
+                <a:solidFill>
+                  <a:srgbClr val="828282"/>
+                </a:solidFill>
+                <a:latin typeface="Arial"/>
+              </a:rPr>
+              <a:t>みまえにつみも,や</a:t>
             </a:r>
           </a:p>
         </p:txBody>

--- a/output_pptx/Joyful_Joyful_We_Adore_Thee.pptx
+++ b/output_pptx/Joyful_Joyful_We_Adore_Thee.pptx
@@ -3342,6 +3342,76 @@
           </a:p>
         </p:txBody>
       </p:sp>
+      <p:sp>
+        <p:nvSpPr>
+          <p:cNvPr id="4" name="TextBox 3"/>
+          <p:cNvSpPr txBox="1"/>
+          <p:nvPr/>
+        </p:nvSpPr>
+        <p:spPr>
+          <a:xfrm>
+            <a:off x="640080" y="4128516"/>
+            <a:ext cx="10911535" cy="310896"/>
+          </a:xfrm>
+          <a:prstGeom prst="rect">
+            <a:avLst/>
+          </a:prstGeom>
+          <a:noFill/>
+        </p:spPr>
+        <p:txBody>
+          <a:bodyPr wrap="square">
+            <a:spAutoFit/>
+          </a:bodyPr>
+          <a:lstStyle/>
+          <a:p>
+            <a:pPr algn="ctr"/>
+            <a:r>
+              <a:rPr sz="2000" b="0" i="0">
+                <a:solidFill>
+                  <a:srgbClr val="828282"/>
+                </a:solidFill>
+                <a:latin typeface="Arial"/>
+              </a:rPr>
+              <a:t>心はあなたの前で花のように開く</a:t>
+            </a:r>
+          </a:p>
+        </p:txBody>
+      </p:sp>
+      <p:sp>
+        <p:nvSpPr>
+          <p:cNvPr id="5" name="TextBox 4"/>
+          <p:cNvSpPr txBox="1"/>
+          <p:nvPr/>
+        </p:nvSpPr>
+        <p:spPr>
+          <a:xfrm>
+            <a:off x="640080" y="4494276"/>
+            <a:ext cx="10911535" cy="310896"/>
+          </a:xfrm>
+          <a:prstGeom prst="rect">
+            <a:avLst/>
+          </a:prstGeom>
+          <a:noFill/>
+        </p:spPr>
+        <p:txBody>
+          <a:bodyPr wrap="square">
+            <a:spAutoFit/>
+          </a:bodyPr>
+          <a:lstStyle/>
+          <a:p>
+            <a:pPr algn="ctr"/>
+            <a:r>
+              <a:rPr sz="2000" b="0" i="0">
+                <a:solidFill>
+                  <a:srgbClr val="828282"/>
+                </a:solidFill>
+                <a:latin typeface="Arial"/>
+              </a:rPr>
+              <a:t>太陽よりも高くあなたを褒め讃える</a:t>
+            </a:r>
+          </a:p>
+        </p:txBody>
+      </p:sp>
     </p:spTree>
   </p:cSld>
   <p:clrMapOvr>
@@ -3438,6 +3508,76 @@
           </a:p>
         </p:txBody>
       </p:sp>
+      <p:sp>
+        <p:nvSpPr>
+          <p:cNvPr id="4" name="TextBox 3"/>
+          <p:cNvSpPr txBox="1"/>
+          <p:nvPr/>
+        </p:nvSpPr>
+        <p:spPr>
+          <a:xfrm>
+            <a:off x="640080" y="4128516"/>
+            <a:ext cx="10911535" cy="310896"/>
+          </a:xfrm>
+          <a:prstGeom prst="rect">
+            <a:avLst/>
+          </a:prstGeom>
+          <a:noFill/>
+        </p:spPr>
+        <p:txBody>
+          <a:bodyPr wrap="square">
+            <a:spAutoFit/>
+          </a:bodyPr>
+          <a:lstStyle/>
+          <a:p>
+            <a:pPr algn="ctr"/>
+            <a:r>
+              <a:rPr sz="2000" b="0" i="0">
+                <a:solidFill>
+                  <a:srgbClr val="828282"/>
+                </a:solidFill>
+                <a:latin typeface="Arial"/>
+              </a:rPr>
+              <a:t>心はあなたの前で花のように開く</a:t>
+            </a:r>
+          </a:p>
+        </p:txBody>
+      </p:sp>
+      <p:sp>
+        <p:nvSpPr>
+          <p:cNvPr id="5" name="TextBox 4"/>
+          <p:cNvSpPr txBox="1"/>
+          <p:nvPr/>
+        </p:nvSpPr>
+        <p:spPr>
+          <a:xfrm>
+            <a:off x="640080" y="4494276"/>
+            <a:ext cx="10911535" cy="310896"/>
+          </a:xfrm>
+          <a:prstGeom prst="rect">
+            <a:avLst/>
+          </a:prstGeom>
+          <a:noFill/>
+        </p:spPr>
+        <p:txBody>
+          <a:bodyPr wrap="square">
+            <a:spAutoFit/>
+          </a:bodyPr>
+          <a:lstStyle/>
+          <a:p>
+            <a:pPr algn="ctr"/>
+            <a:r>
+              <a:rPr sz="2000" b="0" i="0">
+                <a:solidFill>
+                  <a:srgbClr val="828282"/>
+                </a:solidFill>
+                <a:latin typeface="Arial"/>
+              </a:rPr>
+              <a:t>太陽よりも高くあなたを褒め讃える</a:t>
+            </a:r>
+          </a:p>
+        </p:txBody>
+      </p:sp>
     </p:spTree>
   </p:cSld>
   <p:clrMapOvr>
@@ -3700,6 +3840,76 @@
           </a:p>
         </p:txBody>
       </p:sp>
+      <p:sp>
+        <p:nvSpPr>
+          <p:cNvPr id="4" name="TextBox 3"/>
+          <p:cNvSpPr txBox="1"/>
+          <p:nvPr/>
+        </p:nvSpPr>
+        <p:spPr>
+          <a:xfrm>
+            <a:off x="640080" y="4128516"/>
+            <a:ext cx="10911535" cy="310896"/>
+          </a:xfrm>
+          <a:prstGeom prst="rect">
+            <a:avLst/>
+          </a:prstGeom>
+          <a:noFill/>
+        </p:spPr>
+        <p:txBody>
+          <a:bodyPr wrap="square">
+            <a:spAutoFit/>
+          </a:bodyPr>
+          <a:lstStyle/>
+          <a:p>
+            <a:pPr algn="ctr"/>
+            <a:r>
+              <a:rPr sz="2000" b="0" i="0">
+                <a:solidFill>
+                  <a:srgbClr val="828282"/>
+                </a:solidFill>
+                <a:latin typeface="Arial"/>
+              </a:rPr>
+              <a:t>心はあなたの前で花のように開く</a:t>
+            </a:r>
+          </a:p>
+        </p:txBody>
+      </p:sp>
+      <p:sp>
+        <p:nvSpPr>
+          <p:cNvPr id="5" name="TextBox 4"/>
+          <p:cNvSpPr txBox="1"/>
+          <p:nvPr/>
+        </p:nvSpPr>
+        <p:spPr>
+          <a:xfrm>
+            <a:off x="640080" y="4494276"/>
+            <a:ext cx="10911535" cy="310896"/>
+          </a:xfrm>
+          <a:prstGeom prst="rect">
+            <a:avLst/>
+          </a:prstGeom>
+          <a:noFill/>
+        </p:spPr>
+        <p:txBody>
+          <a:bodyPr wrap="square">
+            <a:spAutoFit/>
+          </a:bodyPr>
+          <a:lstStyle/>
+          <a:p>
+            <a:pPr algn="ctr"/>
+            <a:r>
+              <a:rPr sz="2000" b="0" i="0">
+                <a:solidFill>
+                  <a:srgbClr val="828282"/>
+                </a:solidFill>
+                <a:latin typeface="Arial"/>
+              </a:rPr>
+              <a:t>太陽よりも高くあなたを褒め讃える</a:t>
+            </a:r>
+          </a:p>
+        </p:txBody>
+      </p:sp>
     </p:spTree>
   </p:cSld>
   <p:clrMapOvr>
@@ -4338,6 +4548,76 @@
           </a:p>
         </p:txBody>
       </p:sp>
+      <p:sp>
+        <p:nvSpPr>
+          <p:cNvPr id="6" name="TextBox 5"/>
+          <p:cNvSpPr txBox="1"/>
+          <p:nvPr/>
+        </p:nvSpPr>
+        <p:spPr>
+          <a:xfrm>
+            <a:off x="640080" y="4530852"/>
+            <a:ext cx="10911535" cy="310896"/>
+          </a:xfrm>
+          <a:prstGeom prst="rect">
+            <a:avLst/>
+          </a:prstGeom>
+          <a:noFill/>
+        </p:spPr>
+        <p:txBody>
+          <a:bodyPr wrap="square">
+            <a:spAutoFit/>
+          </a:bodyPr>
+          <a:lstStyle/>
+          <a:p>
+            <a:pPr algn="ctr"/>
+            <a:r>
+              <a:rPr sz="2000" b="0" i="1">
+                <a:solidFill>
+                  <a:srgbClr val="828282"/>
+                </a:solidFill>
+                <a:latin typeface="Arial"/>
+              </a:rPr>
+              <a:t>Até mesmo a graça desaparece</a:t>
+            </a:r>
+          </a:p>
+        </p:txBody>
+      </p:sp>
+      <p:sp>
+        <p:nvSpPr>
+          <p:cNvPr id="7" name="TextBox 6"/>
+          <p:cNvSpPr txBox="1"/>
+          <p:nvPr/>
+        </p:nvSpPr>
+        <p:spPr>
+          <a:xfrm>
+            <a:off x="640080" y="4896612"/>
+            <a:ext cx="10911535" cy="310896"/>
+          </a:xfrm>
+          <a:prstGeom prst="rect">
+            <a:avLst/>
+          </a:prstGeom>
+          <a:noFill/>
+        </p:spPr>
+        <p:txBody>
+          <a:bodyPr wrap="square">
+            <a:spAutoFit/>
+          </a:bodyPr>
+          <a:lstStyle/>
+          <a:p>
+            <a:pPr algn="ctr"/>
+            <a:r>
+              <a:rPr sz="2000" b="0" i="1">
+                <a:solidFill>
+                  <a:srgbClr val="828282"/>
+                </a:solidFill>
+                <a:latin typeface="Arial"/>
+              </a:rPr>
+              <a:t>Cheio de alegria eterna e luz</a:t>
+            </a:r>
+          </a:p>
+        </p:txBody>
+      </p:sp>
     </p:spTree>
   </p:cSld>
   <p:clrMapOvr>
@@ -4430,6 +4710,76 @@
                 <a:latin typeface="Arial"/>
               </a:rPr>
               <a:t>Te saudamos acima do sol</a:t>
+            </a:r>
+          </a:p>
+        </p:txBody>
+      </p:sp>
+      <p:sp>
+        <p:nvSpPr>
+          <p:cNvPr id="4" name="TextBox 3"/>
+          <p:cNvSpPr txBox="1"/>
+          <p:nvPr/>
+        </p:nvSpPr>
+        <p:spPr>
+          <a:xfrm>
+            <a:off x="640080" y="4128516"/>
+            <a:ext cx="10911535" cy="310896"/>
+          </a:xfrm>
+          <a:prstGeom prst="rect">
+            <a:avLst/>
+          </a:prstGeom>
+          <a:noFill/>
+        </p:spPr>
+        <p:txBody>
+          <a:bodyPr wrap="square">
+            <a:spAutoFit/>
+          </a:bodyPr>
+          <a:lstStyle/>
+          <a:p>
+            <a:pPr algn="ctr"/>
+            <a:r>
+              <a:rPr sz="2000" b="0" i="0">
+                <a:solidFill>
+                  <a:srgbClr val="828282"/>
+                </a:solidFill>
+                <a:latin typeface="Arial"/>
+              </a:rPr>
+              <a:t>心はあなたの前で花のように開く</a:t>
+            </a:r>
+          </a:p>
+        </p:txBody>
+      </p:sp>
+      <p:sp>
+        <p:nvSpPr>
+          <p:cNvPr id="5" name="TextBox 4"/>
+          <p:cNvSpPr txBox="1"/>
+          <p:nvPr/>
+        </p:nvSpPr>
+        <p:spPr>
+          <a:xfrm>
+            <a:off x="640080" y="4494276"/>
+            <a:ext cx="10911535" cy="310896"/>
+          </a:xfrm>
+          <a:prstGeom prst="rect">
+            <a:avLst/>
+          </a:prstGeom>
+          <a:noFill/>
+        </p:spPr>
+        <p:txBody>
+          <a:bodyPr wrap="square">
+            <a:spAutoFit/>
+          </a:bodyPr>
+          <a:lstStyle/>
+          <a:p>
+            <a:pPr algn="ctr"/>
+            <a:r>
+              <a:rPr sz="2000" b="0" i="0">
+                <a:solidFill>
+                  <a:srgbClr val="828282"/>
+                </a:solidFill>
+                <a:latin typeface="Arial"/>
+              </a:rPr>
+              <a:t>太陽よりも高くあなたを褒め讃える</a:t>
             </a:r>
           </a:p>
         </p:txBody>
